--- a/PIE_가이드_TiengViet.pptx
+++ b/PIE_가이드_TiengViet.pptx
@@ -28247,7 +28247,7 @@
         </p:nvGraphicFramePr>
         <p:xfrm>
           <a:off x="640080" y="1143000"/>
-          <a:ext cx="10881360" cy="1481328"/>
+          <a:ext cx="10881360" cy="1773936"/>
         </p:xfrm>
         <a:graphic>
           <a:graphicData uri="http://schemas.openxmlformats.org/drawingml/2006/table">
@@ -28260,7 +28260,7 @@
                 <a:gridCol w="3627120"/>
                 <a:gridCol w="3627120"/>
               </a:tblGrid>
-              <a:tr h="296265">
+              <a:tr h="295656">
                 <a:tc>
                   <a:txBody>
                     <a:bodyPr/>
@@ -28328,7 +28328,7 @@
                   </a:tcPr>
                 </a:tc>
               </a:tr>
-              <a:tr h="296265">
+              <a:tr h="295656">
                 <a:tc>
                   <a:txBody>
                     <a:bodyPr/>
@@ -28411,7 +28411,7 @@
                   </a:tcPr>
                 </a:tc>
               </a:tr>
-              <a:tr h="296265">
+              <a:tr h="295656">
                 <a:tc>
                   <a:txBody>
                     <a:bodyPr/>
@@ -28494,7 +28494,7 @@
                   </a:tcPr>
                 </a:tc>
               </a:tr>
-              <a:tr h="296265">
+              <a:tr h="295656">
                 <a:tc>
                   <a:txBody>
                     <a:bodyPr/>
@@ -28577,7 +28577,7 @@
                   </a:tcPr>
                 </a:tc>
               </a:tr>
-              <a:tr h="296268">
+              <a:tr h="295656">
                 <a:tc>
                   <a:txBody>
                     <a:bodyPr/>
@@ -28649,7 +28649,7 @@
                           </a:solidFill>
                           <a:latin typeface="Segoe UI"/>
                         </a:rPr>
-                        <a:t>Khi nhiều máy cùng tích lũy chung thời gian chuẩn</a:t>
+                        <a:t>Khi tích lũy chung trong cùng một nhà máy</a:t>
                       </a:r>
                     </a:p>
                   </a:txBody>
@@ -28660,6 +28660,98 @@
                   </a:tcPr>
                 </a:tc>
               </a:tr>
+              <a:tr h="295656">
+                <a:tc>
+                  <a:txBody>
+                    <a:bodyPr/>
+                    <a:lstStyle/>
+                    <a:p>
+                      <a:pPr>
+                        <a:lnSpc>
+                          <a:spcPct val="95000"/>
+                        </a:lnSpc>
+                      </a:pPr>
+                      <a:r>
+                        <a:rPr sz="1100" b="0">
+                          <a:solidFill>
+                            <a:srgbClr val="111827"/>
+                          </a:solidFill>
+                          <a:latin typeface="Segoe UI"/>
+                        </a:rPr>
+                        <a:t>Cài đặt &gt; Kho lưu trữ chung &gt; 📊 Google Sheets</a:t>
+                      </a:r>
+                    </a:p>
+                  </a:txBody>
+                  <a:tcPr marL="54864" marR="54864" marT="18288" marB="18288">
+                    <a:solidFill>
+                      <a:srgbClr val="F1F5F9"/>
+                    </a:solidFill>
+                  </a:tcPr>
+                </a:tc>
+                <a:tc>
+                  <a:txBody>
+                    <a:bodyPr/>
+                    <a:lstStyle/>
+                    <a:p>
+                      <a:pPr>
+                        <a:lnSpc>
+                          <a:spcPct val="95000"/>
+                        </a:lnSpc>
+                      </a:pPr>
+                      <a:r>
+                        <a:rPr sz="1100" b="0">
+                          <a:solidFill>
+                            <a:srgbClr val="111827"/>
+                          </a:solidFill>
+                          <a:latin typeface="Segoe UI"/>
+                        </a:rPr>
+                        <a:t>Google Trang tính</a:t>
+                      </a:r>
+                    </a:p>
+                  </a:txBody>
+                  <a:tcPr marL="54864" marR="54864" marT="18288" marB="18288">
+                    <a:solidFill>
+                      <a:srgbClr val="F1F5F9"/>
+                    </a:solidFill>
+                  </a:tcPr>
+                </a:tc>
+                <a:tc>
+                  <a:txBody>
+                    <a:bodyPr/>
+                    <a:lstStyle/>
+                    <a:p>
+                      <a:pPr>
+                        <a:lnSpc>
+                          <a:spcPct val="95000"/>
+                        </a:lnSpc>
+                      </a:pPr>
+                      <a:r>
+                        <a:rPr sz="1100" b="1">
+                          <a:solidFill>
+                            <a:srgbClr val="111827"/>
+                          </a:solidFill>
+                          <a:latin typeface="Segoe UI"/>
+                        </a:rPr>
+                        <a:t>Khi chia sẻ giữa các khu vực xa nhau</a:t>
+                      </a:r>
+                      <a:r>
+                        <a:rPr sz="1100" b="0">
+                          <a:solidFill>
+                            <a:srgbClr val="111827"/>
+                          </a:solidFill>
+                          <a:latin typeface="Segoe UI"/>
+                        </a:rPr>
+                        <a:t> (cần Internet)</a:t>
+                      </a:r>
+                    </a:p>
+                  </a:txBody>
+                  <a:tcPr marL="54864" marR="54864" marT="18288" marB="18288">
+                    <a:solidFill>
+                      <a:srgbClr val="F1F5F9"/>
+                    </a:solidFill>
+                  </a:tcPr>
+                </a:tc>
+              </a:tr>
             </a:tbl>
           </a:graphicData>
         </a:graphic>
@@ -28672,7 +28764,7 @@
         </p:nvSpPr>
         <p:spPr>
           <a:xfrm>
-            <a:off x="640080" y="2852928"/>
+            <a:off x="640080" y="3145536"/>
             <a:ext cx="10881360" cy="566928"/>
           </a:xfrm>
           <a:prstGeom prst="roundRect">
@@ -28720,7 +28812,7 @@
         </p:nvSpPr>
         <p:spPr>
           <a:xfrm>
-            <a:off x="822960" y="2852928"/>
+            <a:off x="822960" y="3145536"/>
             <a:ext cx="10515600" cy="566928"/>
           </a:xfrm>
           <a:prstGeom prst="rect">

--- a/PIE_가이드_TiengViet.pptx
+++ b/PIE_가이드_TiengViet.pptx
@@ -29460,7 +29460,7 @@
                           </a:solidFill>
                           <a:latin typeface="Segoe UI"/>
                         </a:rPr>
-                        <a:t>PIE(중국).bat</a:t>
+                        <a:t>PIE 실행.bat</a:t>
                       </a:r>
                       <a:r>
                         <a:rPr sz="1100" b="0">
@@ -32558,7 +32558,7 @@
                 </a:solidFill>
                 <a:latin typeface="Segoe UI"/>
               </a:rPr>
-              <a:t>PIE(중국).bat</a:t>
+              <a:t>PIE 실행.bat</a:t>
             </a:r>
             <a:r>
               <a:rPr sz="1300" b="0">
@@ -32838,7 +32838,7 @@
                 </a:solidFill>
                 <a:latin typeface="Segoe UI"/>
               </a:rPr>
-              <a:t>Nhấp đúp PIE(중국).bat</a:t>
+              <a:t>Nhấp đúp PIE 실행.bat</a:t>
             </a:r>
           </a:p>
         </p:txBody>
@@ -33667,7 +33667,7 @@
                 </a:solidFill>
                 <a:latin typeface="Segoe UI"/>
               </a:rPr>
-              <a:t>PIE(중국).bat</a:t>
+              <a:t>PIE 실행.bat</a:t>
             </a:r>
             <a:r>
               <a:rPr sz="1300" b="0">
